--- a/ppt_engine/templates/solution_fixed_modules/M5/轨道交通：沈阳地铁1号线东延线出入线区间声屏障安装工程.pptx
+++ b/ppt_engine/templates/solution_fixed_modules/M5/轨道交通：沈阳地铁1号线东延线出入线区间声屏障安装工程.pptx
@@ -3363,6 +3363,113 @@
           </a:prstGeom>
         </p:spPr>
       </p:pic>
+      <p:grpSp>
+        <p:nvGrpSpPr>
+          <p:cNvPr id="5" name="组合 4">
+            <a:extLst>
+              <a:ext uri="{FF2B5EF4-FFF2-40B4-BE49-F238E27FC236}">
+                <a16:creationId xmlns:a16="http://schemas.microsoft.com/office/drawing/2014/main" id="{BFAC50A1-DFEE-3694-A872-70CD928726C8}"/>
+              </a:ext>
+            </a:extLst>
+          </p:cNvPr>
+          <p:cNvGrpSpPr/>
+          <p:nvPr/>
+        </p:nvGrpSpPr>
+        <p:grpSpPr>
+          <a:xfrm>
+            <a:off x="9577302" y="215877"/>
+            <a:ext cx="1695878" cy="706616"/>
+            <a:chOff x="9577302" y="1165376"/>
+            <a:chExt cx="1695878" cy="706616"/>
+          </a:xfrm>
+        </p:grpSpPr>
+        <p:sp>
+          <p:nvSpPr>
+            <p:cNvPr id="7" name="矩形 6">
+              <a:extLst>
+                <a:ext uri="{FF2B5EF4-FFF2-40B4-BE49-F238E27FC236}">
+                  <a16:creationId xmlns:a16="http://schemas.microsoft.com/office/drawing/2014/main" id="{05A2BDE8-CD84-3BA6-B2B1-4355931C70BF}"/>
+                </a:ext>
+              </a:extLst>
+            </p:cNvPr>
+            <p:cNvSpPr/>
+            <p:nvPr/>
+          </p:nvSpPr>
+          <p:spPr>
+            <a:xfrm>
+              <a:off x="9721312" y="1295952"/>
+              <a:ext cx="1440100" cy="432030"/>
+            </a:xfrm>
+            <a:prstGeom prst="rect">
+              <a:avLst/>
+            </a:prstGeom>
+            <a:noFill/>
+            <a:ln>
+              <a:noFill/>
+            </a:ln>
+          </p:spPr>
+          <p:style>
+            <a:lnRef idx="2">
+              <a:schemeClr val="accent1">
+                <a:shade val="15000"/>
+              </a:schemeClr>
+            </a:lnRef>
+            <a:fillRef idx="1">
+              <a:schemeClr val="accent1"/>
+            </a:fillRef>
+            <a:effectRef idx="0">
+              <a:schemeClr val="accent1"/>
+            </a:effectRef>
+            <a:fontRef idx="minor">
+              <a:schemeClr val="lt1"/>
+            </a:fontRef>
+          </p:style>
+          <p:txBody>
+            <a:bodyPr rtlCol="0" anchor="ctr"/>
+            <a:lstStyle/>
+            <a:p>
+              <a:pPr algn="ctr"/>
+              <a:endParaRPr lang="zh-CN" altLang="en-US"/>
+            </a:p>
+          </p:txBody>
+        </p:sp>
+        <p:pic>
+          <p:nvPicPr>
+            <p:cNvPr id="9" name="图片 8">
+              <a:extLst>
+                <a:ext uri="{FF2B5EF4-FFF2-40B4-BE49-F238E27FC236}">
+                  <a16:creationId xmlns:a16="http://schemas.microsoft.com/office/drawing/2014/main" id="{D2FBC02C-CE64-CC16-CFCA-A0D8A3A71C55}"/>
+                </a:ext>
+              </a:extLst>
+            </p:cNvPr>
+            <p:cNvPicPr>
+              <a:picLocks noChangeAspect="1"/>
+            </p:cNvPicPr>
+            <p:nvPr/>
+          </p:nvPicPr>
+          <p:blipFill>
+            <a:blip r:embed="rId9">
+              <a:extLst>
+                <a:ext uri="{28A0092B-C50C-407E-A947-70E740481C1C}">
+                  <a14:useLocalDpi xmlns:a14="http://schemas.microsoft.com/office/drawing/2010/main" val="0"/>
+                </a:ext>
+              </a:extLst>
+            </a:blip>
+            <a:stretch>
+              <a:fillRect/>
+            </a:stretch>
+          </p:blipFill>
+          <p:spPr>
+            <a:xfrm>
+              <a:off x="9577302" y="1165376"/>
+              <a:ext cx="1695878" cy="706616"/>
+            </a:xfrm>
+            <a:prstGeom prst="rect">
+              <a:avLst/>
+            </a:prstGeom>
+          </p:spPr>
+        </p:pic>
+      </p:grpSp>
     </p:spTree>
     <p:extLst>
       <p:ext uri="{BB962C8B-B14F-4D97-AF65-F5344CB8AC3E}">
